--- a/entregables/presentaciones/IQS_B7_ROS2_Planificacion.pptx
+++ b/entregables/presentaciones/IQS_B7_ROS2_Planificacion.pptx
@@ -1122,7 +1122,7 @@
           <a:lstStyle/>
           <a:p>
             <a:r>
-              <a:t>Recorrer los cuatro algoritmos con su criterio de uso. Contar la anécdota de Shakey y el origen de A* en 1966. Mencionar D* (replanifica en marcha) y la variante con recableado de RRT. Para el parcial basta A*: coste acumulado más heurística, y optimalidad solo con heurística admisible.</a:t>
+              <a:t>Recorrer los cuatro algoritmos con su criterio de uso. Contar la anécdota de Shakey y el origen de A* en 1968. Mencionar D* (replanifica en marcha) y la variante con recableado de RRT. Para el parcial basta A*: coste acumulado más heurística, y optimalidad solo con heurística admisible.</a:t>
             </a:r>
           </a:p>
         </p:txBody>
@@ -4012,7 +4012,7 @@
                 <a:ea typeface="Calibri" pitchFamily="34" charset="-122"/>
                 <a:cs typeface="Calibri" pitchFamily="34" charset="-120"/>
               </a:rPr>
-              <a:t>map → odom → base_link → marcos de sensores. La transformada odom→base_link es continua pero deriva; la map→odom la corrige a saltos cuando la localización se actualiza. Entender esta cadena explica por qué el robot «salta» en RViz al cerrar un bucle, y conecta directamente con la localización del bloque 6 y con AMCL en la sesión siguiente.</a:t>
+              <a:t>map → odom → base_link → marcos de sensores. La transformada odom→base_link es continua pero deriva; la map→odom la corrige a saltos cuando la localización se actualiza. Entender esta cadena explica por qué el robot «salta» en RViz al cerrar un bucle, y conecta directamente con la localización del bloque 6 y con AMCL en S36.</a:t>
             </a:r>
             <a:endParaRPr lang="en-US" sz="1250" dirty="0"/>
           </a:p>

--- a/entregables/presentaciones/IQS_B7_ROS2_Planificacion.pptx
+++ b/entregables/presentaciones/IQS_B7_ROS2_Planificacion.pptx
@@ -3034,6 +3034,43 @@
           </a:p>
         </p:txBody>
       </p:sp>
+      <p:sp>
+        <p:nvSpPr>
+          <p:cNvPr id="8" name="TextBox 7">
+            <a:hlinkClick r:id="rId3"/>
+          </p:cNvPr>
+          <p:cNvSpPr txBox="1"/>
+          <p:nvPr/>
+        </p:nvSpPr>
+        <p:spPr>
+          <a:xfrm>
+            <a:off x="2057400" y="3310128"/>
+            <a:ext cx="5486400" cy="347472"/>
+          </a:xfrm>
+          <a:prstGeom prst="rect">
+            <a:avLst/>
+          </a:prstGeom>
+          <a:noFill/>
+        </p:spPr>
+        <p:txBody>
+          <a:bodyPr wrap="square" lIns="0" tIns="0" bIns="0" rIns="0">
+            <a:noAutofit/>
+          </a:bodyPr>
+          <a:lstStyle/>
+          <a:p>
+            <a:pPr algn="l"/>
+            <a:r>
+              <a:rPr sz="1400" b="1">
+                <a:solidFill>
+                  <a:srgbClr val="2FD26E"/>
+                </a:solidFill>
+                <a:latin typeface="Calibri"/>
+              </a:rPr>
+              <a:t>▸  Abrir en Colab · cuaderno S34</a:t>
+            </a:r>
+          </a:p>
+        </p:txBody>
+      </p:sp>
     </p:spTree>
   </p:cSld>
   <p:clrMapOvr>
@@ -4278,6 +4315,43 @@
               <a:t>Mapas y C-space · A* · PRM y RRT · campos potenciales</a:t>
             </a:r>
             <a:endParaRPr lang="en-US" sz="1600" dirty="0"/>
+          </a:p>
+        </p:txBody>
+      </p:sp>
+      <p:sp>
+        <p:nvSpPr>
+          <p:cNvPr id="8" name="TextBox 7">
+            <a:hlinkClick r:id="rId3"/>
+          </p:cNvPr>
+          <p:cNvSpPr txBox="1"/>
+          <p:nvPr/>
+        </p:nvSpPr>
+        <p:spPr>
+          <a:xfrm>
+            <a:off x="2057400" y="3310128"/>
+            <a:ext cx="5486400" cy="347472"/>
+          </a:xfrm>
+          <a:prstGeom prst="rect">
+            <a:avLst/>
+          </a:prstGeom>
+          <a:noFill/>
+        </p:spPr>
+        <p:txBody>
+          <a:bodyPr wrap="square" lIns="0" tIns="0" bIns="0" rIns="0">
+            <a:noAutofit/>
+          </a:bodyPr>
+          <a:lstStyle/>
+          <a:p>
+            <a:pPr algn="l"/>
+            <a:r>
+              <a:rPr sz="1400" b="1">
+                <a:solidFill>
+                  <a:srgbClr val="2FD26E"/>
+                </a:solidFill>
+                <a:latin typeface="Calibri"/>
+              </a:rPr>
+              <a:t>▸  Abrir en Colab · cuaderno S35</a:t>
+            </a:r>
           </a:p>
         </p:txBody>
       </p:sp>
